--- a/系统架构图.pptx
+++ b/系统架构图.pptx
@@ -107,7 +107,7 @@
   <p:extLst>
     <p:ext uri="{EFAFB233-063F-42B5-8137-9DF3F51BA10A}">
       <p15:sldGuideLst xmlns:p15="http://schemas.microsoft.com/office/powerpoint/2012/main">
-        <p15:guide id="1" orient="horz" pos="2165" userDrawn="1">
+        <p15:guide id="1" orient="horz" pos="2202" userDrawn="1">
           <p15:clr>
             <a:srgbClr val="A4A3A4"/>
           </p15:clr>
@@ -4433,11 +4433,13 @@
         </p:nvSpPr>
         <p:spPr>
           <a:xfrm>
-            <a:off x="8853805" y="1334770"/>
-            <a:ext cx="2926080" cy="3662045"/>
+            <a:off x="8846185" y="1334770"/>
+            <a:ext cx="2582545" cy="3537585"/>
           </a:xfrm>
           <a:prstGeom prst="roundRect">
-            <a:avLst/>
+            <a:avLst>
+              <a:gd name="adj" fmla="val 5965"/>
+            </a:avLst>
           </a:prstGeom>
           <a:solidFill>
             <a:srgbClr val="EEEEEE"/>
@@ -4597,7 +4599,7 @@
         </p:nvSpPr>
         <p:spPr>
           <a:xfrm>
-            <a:off x="9128125" y="2490724"/>
+            <a:off x="8963025" y="2490724"/>
             <a:ext cx="2377440" cy="548640"/>
           </a:xfrm>
           <a:prstGeom prst="roundRect">
@@ -4656,7 +4658,7 @@
         </p:nvSpPr>
         <p:spPr>
           <a:xfrm>
-            <a:off x="9128125" y="3222244"/>
+            <a:off x="8963025" y="3222244"/>
             <a:ext cx="2377440" cy="548640"/>
           </a:xfrm>
           <a:prstGeom prst="roundRect">
@@ -4713,7 +4715,23 @@
                 </a:solidFill>
               </a:rPr>
               <a:t>
-(策略决策引擎)</a:t>
+</a:t>
+            </a:r>
+            <a:r>
+              <a:rPr lang="zh-CN" sz="1400" b="1">
+                <a:solidFill>
+                  <a:srgbClr val="222222"/>
+                </a:solidFill>
+              </a:rPr>
+              <a:t>集群</a:t>
+            </a:r>
+            <a:r>
+              <a:rPr sz="1400" b="1">
+                <a:solidFill>
+                  <a:srgbClr val="222222"/>
+                </a:solidFill>
+              </a:rPr>
+              <a:t>策略引擎</a:t>
             </a:r>
             <a:endParaRPr sz="1400" b="1">
               <a:solidFill>
@@ -4731,7 +4749,7 @@
         </p:nvSpPr>
         <p:spPr>
           <a:xfrm>
-            <a:off x="9128125" y="3953764"/>
+            <a:off x="8963025" y="3953764"/>
             <a:ext cx="2377440" cy="548640"/>
           </a:xfrm>
           <a:prstGeom prst="roundRect">
@@ -4772,7 +4790,7 @@
                 </a:solidFill>
               </a:rPr>
               <a:t>Network Policy
-(网络隔离)</a:t>
+网络隔离</a:t>
             </a:r>
             <a:endParaRPr sz="1400" b="1">
               <a:solidFill>
@@ -4791,7 +4809,7 @@
         <p:spPr>
           <a:xfrm>
             <a:off x="7733030" y="1919605"/>
-            <a:ext cx="1107440" cy="274320"/>
+            <a:ext cx="1201420" cy="274320"/>
           </a:xfrm>
           <a:prstGeom prst="rightArrow">
             <a:avLst/>
@@ -4970,7 +4988,7 @@
         </p:nvSpPr>
         <p:spPr>
           <a:xfrm>
-            <a:off x="9103995" y="1837944"/>
+            <a:off x="8938895" y="1837944"/>
             <a:ext cx="2377440" cy="548640"/>
           </a:xfrm>
           <a:prstGeom prst="roundRect">
